--- a/docs/content/nonparametric_t_tests/nonparametric_t_tests_activity.pptx
+++ b/docs/content/nonparametric_t_tests/nonparametric_t_tests_activity.pptx
@@ -5498,7 +5498,7 @@
                 </a:solidFill>
                 <a:latin typeface="Courier"/>
               </a:rPr>
-              <a:t>"steelblue"</a:t>
+              <a:t>"darkblue"</a:t>
             </a:r>
             <a:r>
               <a:rPr>
@@ -5827,7 +5827,7 @@
                 </a:solidFill>
                 <a:latin typeface="Courier"/>
               </a:rPr>
-              <a:t>"steelblue"</a:t>
+              <a:t>"darkblue"</a:t>
             </a:r>
             <a:r>
               <a:rPr>
@@ -6121,7 +6121,7 @@
                 </a:solidFill>
                 <a:latin typeface="Courier"/>
               </a:rPr>
-              <a:t>"steelblue"</a:t>
+              <a:t>"darkblue"</a:t>
             </a:r>
             <a:r>
               <a:rPr>

--- a/docs/content/nonparametric_t_tests/nonparametric_t_tests_activity.pptx
+++ b/docs/content/nonparametric_t_tests/nonparametric_t_tests_activity.pptx
@@ -16,6 +16,7 @@
     <p:sldId id="264" r:id="rId10"/>
     <p:sldId id="265" r:id="rId11"/>
     <p:sldId id="266" r:id="rId12"/>
+    <p:sldId id="267" r:id="rId13"/>
   </p:sldIdLst>
   <p:sldSz cx="9144000" cy="5143500" type="screen16x9"/>
   <p:notesSz cx="6858000" cy="9144000"/>
@@ -3568,6 +3569,600 @@
             </a:pPr>
             <a:r>
               <a:rPr/>
+              <a:t>Part 7 · Take-Home Extension — Crayfish Claw Strength</a:t>
+            </a:r>
+          </a:p>
+        </p:txBody>
+      </p:sp>
+      <p:sp>
+        <p:nvSpPr>
+          <p:cNvPr id="3" name="Content Placeholder 2"/>
+          <p:cNvSpPr>
+            <a:spLocks noGrp="1"/>
+          </p:cNvSpPr>
+          <p:nvPr>
+            <p:ph idx="1"/>
+          </p:nvPr>
+        </p:nvSpPr>
+        <p:spPr/>
+        <p:txBody>
+          <a:bodyPr/>
+          <a:lstStyle/>
+          <a:p>
+            <a:pPr lvl="0" indent="0" marL="0">
+              <a:buNone/>
+            </a:pPr>
+            <a:r>
+              <a:rPr i="1"/>
+              <a:t>Due Wednesday, September 30 — before the Study Design &amp; Sampling class.</a:t>
+            </a:r>
+          </a:p>
+          <a:p>
+            <a:pPr lvl="0" indent="0" marL="0">
+              <a:buNone/>
+            </a:pPr>
+            <a:r>
+              <a:rPr/>
+              <a:t>This time the test itself is the question. You now know five ways to compare two groups — standard t-test, log-transformed t-test, Welch’s t-test, Mann-Whitney, and permutation test. Given a new dataset, you decide which one is appropriate and defend your choice.</a:t>
+            </a:r>
+          </a:p>
+          <a:p>
+            <a:pPr lvl="0" indent="0" marL="0">
+              <a:spcBef>
+                <a:spcPts val="3000"/>
+              </a:spcBef>
+              <a:buNone/>
+            </a:pPr>
+            <a:r>
+              <a:rPr b="1"/>
+              <a:t>Background</a:t>
+            </a:r>
+          </a:p>
+          <a:p>
+            <a:pPr lvl="0" indent="0" marL="0">
+              <a:buNone/>
+            </a:pPr>
+            <a:r>
+              <a:rPr/>
+              <a:t>Graham &amp; Angilletta (2022) asked whether claw strength in crayfish honestly signals fighting ability. They compared maximum claw strength between stream-dwelling crayfish (which fight often and may use claws to signal) and burrowing crayfish (docile, claws used mainly for digging).</a:t>
+            </a:r>
+          </a:p>
+          <a:p>
+            <a:pPr lvl="0" indent="0" marL="0">
+              <a:buNone/>
+            </a:pPr>
+            <a:r>
+              <a:rPr b="1"/>
+              <a:t>▶ Run this</a:t>
+            </a:r>
+            <a:r>
+              <a:rPr/>
+              <a:t> — load the data and collapse to one claw-strength value per individual. Each crayfish has up to two claws measured (left and right) — you already know from the pine needle data why those can’t be treated as independent observations:</a:t>
+            </a:r>
+          </a:p>
+          <a:p>
+            <a:pPr lvl="0" indent="0">
+              <a:buNone/>
+            </a:pPr>
+            <a:r>
+              <a:rPr>
+                <a:solidFill>
+                  <a:srgbClr val="003B4F"/>
+                </a:solidFill>
+                <a:latin typeface="Courier"/>
+              </a:rPr>
+              <a:t>claw_df &lt;- </a:t>
+            </a:r>
+            <a:r>
+              <a:rPr>
+                <a:solidFill>
+                  <a:srgbClr val="4758AB"/>
+                </a:solidFill>
+                <a:latin typeface="Courier"/>
+              </a:rPr>
+              <a:t>read_csv</a:t>
+            </a:r>
+            <a:r>
+              <a:rPr>
+                <a:solidFill>
+                  <a:srgbClr val="003B4F"/>
+                </a:solidFill>
+                <a:latin typeface="Courier"/>
+              </a:rPr>
+              <a:t>(</a:t>
+            </a:r>
+            <a:r>
+              <a:rPr>
+                <a:solidFill>
+                  <a:srgbClr val="20794D"/>
+                </a:solidFill>
+                <a:latin typeface="Courier"/>
+              </a:rPr>
+              <a:t>"data/graham_and_angilletta_claw_data.csv"</a:t>
+            </a:r>
+            <a:r>
+              <a:rPr>
+                <a:solidFill>
+                  <a:srgbClr val="003B4F"/>
+                </a:solidFill>
+                <a:latin typeface="Courier"/>
+              </a:rPr>
+              <a:t>)</a:t>
+            </a:r>
+            <a:br/>
+            <a:br/>
+            <a:r>
+              <a:rPr>
+                <a:solidFill>
+                  <a:srgbClr val="003B4F"/>
+                </a:solidFill>
+                <a:latin typeface="Courier"/>
+              </a:rPr>
+              <a:t>crayfish_df &lt;- claw_df </a:t>
+            </a:r>
+            <a:r>
+              <a:rPr>
+                <a:solidFill>
+                  <a:srgbClr val="5E5E5E"/>
+                </a:solidFill>
+                <a:latin typeface="Courier"/>
+              </a:rPr>
+              <a:t>%&gt;%</a:t>
+            </a:r>
+            <a:br/>
+            <a:r>
+              <a:rPr>
+                <a:solidFill>
+                  <a:srgbClr val="003B4F"/>
+                </a:solidFill>
+                <a:latin typeface="Courier"/>
+              </a:rPr>
+              <a:t>  </a:t>
+            </a:r>
+            <a:r>
+              <a:rPr>
+                <a:solidFill>
+                  <a:srgbClr val="4758AB"/>
+                </a:solidFill>
+                <a:latin typeface="Courier"/>
+              </a:rPr>
+              <a:t>group_by</a:t>
+            </a:r>
+            <a:r>
+              <a:rPr>
+                <a:solidFill>
+                  <a:srgbClr val="003B4F"/>
+                </a:solidFill>
+                <a:latin typeface="Courier"/>
+              </a:rPr>
+              <a:t>(crayfish.id, lifestyle) </a:t>
+            </a:r>
+            <a:r>
+              <a:rPr>
+                <a:solidFill>
+                  <a:srgbClr val="5E5E5E"/>
+                </a:solidFill>
+                <a:latin typeface="Courier"/>
+              </a:rPr>
+              <a:t>%&gt;%</a:t>
+            </a:r>
+            <a:br/>
+            <a:r>
+              <a:rPr>
+                <a:solidFill>
+                  <a:srgbClr val="003B4F"/>
+                </a:solidFill>
+                <a:latin typeface="Courier"/>
+              </a:rPr>
+              <a:t>  </a:t>
+            </a:r>
+            <a:r>
+              <a:rPr>
+                <a:solidFill>
+                  <a:srgbClr val="4758AB"/>
+                </a:solidFill>
+                <a:latin typeface="Courier"/>
+              </a:rPr>
+              <a:t>summarize</a:t>
+            </a:r>
+            <a:r>
+              <a:rPr>
+                <a:solidFill>
+                  <a:srgbClr val="003B4F"/>
+                </a:solidFill>
+                <a:latin typeface="Courier"/>
+              </a:rPr>
+              <a:t>(</a:t>
+            </a:r>
+            <a:r>
+              <a:rPr>
+                <a:solidFill>
+                  <a:srgbClr val="657422"/>
+                </a:solidFill>
+                <a:latin typeface="Courier"/>
+              </a:rPr>
+              <a:t>maxclawstr_N =</a:t>
+            </a:r>
+            <a:r>
+              <a:rPr>
+                <a:solidFill>
+                  <a:srgbClr val="003B4F"/>
+                </a:solidFill>
+                <a:latin typeface="Courier"/>
+              </a:rPr>
+              <a:t> </a:t>
+            </a:r>
+            <a:r>
+              <a:rPr>
+                <a:solidFill>
+                  <a:srgbClr val="4758AB"/>
+                </a:solidFill>
+                <a:latin typeface="Courier"/>
+              </a:rPr>
+              <a:t>mean</a:t>
+            </a:r>
+            <a:r>
+              <a:rPr>
+                <a:solidFill>
+                  <a:srgbClr val="003B4F"/>
+                </a:solidFill>
+                <a:latin typeface="Courier"/>
+              </a:rPr>
+              <a:t>(maxclawstr.N, </a:t>
+            </a:r>
+            <a:r>
+              <a:rPr>
+                <a:solidFill>
+                  <a:srgbClr val="657422"/>
+                </a:solidFill>
+                <a:latin typeface="Courier"/>
+              </a:rPr>
+              <a:t>na.rm =</a:t>
+            </a:r>
+            <a:r>
+              <a:rPr>
+                <a:solidFill>
+                  <a:srgbClr val="003B4F"/>
+                </a:solidFill>
+                <a:latin typeface="Courier"/>
+              </a:rPr>
+              <a:t> </a:t>
+            </a:r>
+            <a:r>
+              <a:rPr>
+                <a:solidFill>
+                  <a:srgbClr val="8F5902"/>
+                </a:solidFill>
+                <a:latin typeface="Courier"/>
+              </a:rPr>
+              <a:t>TRUE</a:t>
+            </a:r>
+            <a:r>
+              <a:rPr>
+                <a:solidFill>
+                  <a:srgbClr val="003B4F"/>
+                </a:solidFill>
+                <a:latin typeface="Courier"/>
+              </a:rPr>
+              <a:t>), </a:t>
+            </a:r>
+            <a:r>
+              <a:rPr>
+                <a:solidFill>
+                  <a:srgbClr val="657422"/>
+                </a:solidFill>
+                <a:latin typeface="Courier"/>
+              </a:rPr>
+              <a:t>.groups =</a:t>
+            </a:r>
+            <a:r>
+              <a:rPr>
+                <a:solidFill>
+                  <a:srgbClr val="003B4F"/>
+                </a:solidFill>
+                <a:latin typeface="Courier"/>
+              </a:rPr>
+              <a:t> </a:t>
+            </a:r>
+            <a:r>
+              <a:rPr>
+                <a:solidFill>
+                  <a:srgbClr val="20794D"/>
+                </a:solidFill>
+                <a:latin typeface="Courier"/>
+              </a:rPr>
+              <a:t>"drop"</a:t>
+            </a:r>
+            <a:r>
+              <a:rPr>
+                <a:solidFill>
+                  <a:srgbClr val="003B4F"/>
+                </a:solidFill>
+                <a:latin typeface="Courier"/>
+              </a:rPr>
+              <a:t>)</a:t>
+            </a:r>
+            <a:br/>
+            <a:br/>
+            <a:r>
+              <a:rPr>
+                <a:solidFill>
+                  <a:srgbClr val="4758AB"/>
+                </a:solidFill>
+                <a:latin typeface="Courier"/>
+              </a:rPr>
+              <a:t>head</a:t>
+            </a:r>
+            <a:r>
+              <a:rPr>
+                <a:solidFill>
+                  <a:srgbClr val="003B4F"/>
+                </a:solidFill>
+                <a:latin typeface="Courier"/>
+              </a:rPr>
+              <a:t>(crayfish_df)</a:t>
+            </a:r>
+          </a:p>
+          <a:p>
+            <a:pPr lvl="0" indent="0" marL="0">
+              <a:spcBef>
+                <a:spcPts val="3000"/>
+              </a:spcBef>
+              <a:buNone/>
+            </a:pPr>
+            <a:r>
+              <a:rPr b="1"/>
+              <a:t>Your Task</a:t>
+            </a:r>
+          </a:p>
+          <a:p>
+            <a:pPr lvl="0" indent="0" marL="0">
+              <a:buNone/>
+            </a:pPr>
+            <a:r>
+              <a:rPr b="1"/>
+              <a:t>Question:</a:t>
+            </a:r>
+            <a:r>
+              <a:rPr/>
+              <a:t> Does maximum claw strength differ between stream-dwelling and burrowing crayfish?</a:t>
+            </a:r>
+          </a:p>
+          <a:p>
+            <a:pPr lvl="0" indent="0" marL="0">
+              <a:buNone/>
+            </a:pPr>
+            <a:r>
+              <a:rPr/>
+              <a:t>✏️ </a:t>
+            </a:r>
+            <a:r>
+              <a:rPr b="1"/>
+              <a:t>Your turn:</a:t>
+            </a:r>
+            <a:r>
+              <a:rPr/>
+              <a:t> State your hypotheses. Explore the data yourself — normality, variance, sample size, outliers, whatever you need to check — and decide which test from this unit is the right one for this data. Justify your choice, then run it, interpret the result, and write it up as a proper results sentence.</a:t>
+            </a:r>
+          </a:p>
+          <a:p>
+            <a:pPr lvl="0" indent="0">
+              <a:buNone/>
+            </a:pPr>
+            <a:r>
+              <a:rPr>
+                <a:latin typeface="Courier"/>
+              </a:rPr>
+              <a:t>H0 =
+________________________________________________________
+Ha =
+________________________________________________________
+Test I will use and why:
+________________________________________________________</a:t>
+            </a:r>
+          </a:p>
+          <a:p>
+            <a:pPr lvl="0" indent="0">
+              <a:buNone/>
+            </a:pPr>
+            <a:r>
+              <a:rPr>
+                <a:solidFill>
+                  <a:srgbClr val="5E5E5E"/>
+                </a:solidFill>
+                <a:latin typeface="Courier"/>
+              </a:rPr>
+              <a:t># Write your code here:</a:t>
+            </a:r>
+          </a:p>
+          <a:p>
+            <a:pPr lvl="0" indent="0">
+              <a:buNone/>
+            </a:pPr>
+            <a:r>
+              <a:rPr>
+                <a:latin typeface="Courier"/>
+              </a:rPr>
+              <a:t>Interpretation:
+________________________________________________________
+________________________________________________________
+Results sentence:
+________________________________________________________</a:t>
+            </a:r>
+          </a:p>
+          <a:p>
+            <a:pPr lvl="0" indent="0" marL="0">
+              <a:spcBef>
+                <a:spcPts val="3000"/>
+              </a:spcBef>
+              <a:buNone/>
+            </a:pPr>
+            <a:r>
+              <a:rPr b="1"/>
+              <a:t>Final Figure</a:t>
+            </a:r>
+          </a:p>
+          <a:p>
+            <a:pPr lvl="0" indent="0" marL="0">
+              <a:buNone/>
+            </a:pPr>
+            <a:r>
+              <a:rPr/>
+              <a:t>Produce one publication-quality figure comparing claw strength between the two lifestyles — proper axis labels, no default </a:t>
+            </a:r>
+            <a:r>
+              <a:rPr>
+                <a:latin typeface="Courier"/>
+              </a:rPr>
+              <a:t>ggplot</a:t>
+            </a:r>
+            <a:r>
+              <a:rPr/>
+              <a:t> grey background — and export it with </a:t>
+            </a:r>
+            <a:r>
+              <a:rPr>
+                <a:latin typeface="Courier"/>
+              </a:rPr>
+              <a:t>ggsave()</a:t>
+            </a:r>
+            <a:r>
+              <a:rPr/>
+              <a:t>.</a:t>
+            </a:r>
+          </a:p>
+          <a:p>
+            <a:pPr lvl="0" indent="0">
+              <a:buNone/>
+            </a:pPr>
+            <a:r>
+              <a:rPr>
+                <a:solidFill>
+                  <a:srgbClr val="5E5E5E"/>
+                </a:solidFill>
+                <a:latin typeface="Courier"/>
+              </a:rPr>
+              <a:t># Write your code here:</a:t>
+            </a:r>
+          </a:p>
+          <a:p>
+            <a:pPr lvl="0" indent="0" marL="1270000">
+              <a:buNone/>
+            </a:pPr>
+            <a:r>
+              <a:rPr sz="2000" b="1"/>
+              <a:t>Note</a:t>
+            </a:r>
+          </a:p>
+          <a:p>
+            <a:pPr lvl="0" indent="0" marL="1270000">
+              <a:buNone/>
+            </a:pPr>
+            <a:r>
+              <a:rPr sz="2000" b="1"/>
+              <a:t>📤 What to turn in — due Sept 30</a:t>
+            </a:r>
+          </a:p>
+          <a:p>
+            <a:pPr lvl="0" indent="0" marL="1270000">
+              <a:buNone/>
+            </a:pPr>
+            <a:r>
+              <a:rPr sz="2000"/>
+              <a:t>Your write-up should include:</a:t>
+            </a:r>
+          </a:p>
+          <a:p>
+            <a:pPr lvl="0"/>
+            <a:r>
+              <a:rPr sz="2000"/>
+              <a:t>☐ The question</a:t>
+            </a:r>
+          </a:p>
+          <a:p>
+            <a:pPr lvl="0"/>
+            <a:r>
+              <a:rPr sz="2000"/>
+              <a:t>☐ Your hypotheses</a:t>
+            </a:r>
+          </a:p>
+          <a:p>
+            <a:pPr lvl="0"/>
+            <a:r>
+              <a:rPr sz="2000"/>
+              <a:t>☐ Which test you used, and your justification for choosing it</a:t>
+            </a:r>
+          </a:p>
+          <a:p>
+            <a:pPr lvl="0"/>
+            <a:r>
+              <a:rPr sz="2000"/>
+              <a:t>☐ The code and its output</a:t>
+            </a:r>
+          </a:p>
+          <a:p>
+            <a:pPr lvl="0"/>
+            <a:r>
+              <a:rPr sz="2000"/>
+              <a:t>☐ Your interpretation of the result</a:t>
+            </a:r>
+          </a:p>
+          <a:p>
+            <a:pPr lvl="0"/>
+            <a:r>
+              <a:rPr sz="2000"/>
+              <a:t>☐ A final figure showing the result</a:t>
+            </a:r>
+          </a:p>
+        </p:txBody>
+      </p:sp>
+    </p:spTree>
+  </p:cSld>
+</p:sld>
+</file>
+
+<file path=ppt/slides/slide12.xml><?xml version="1.0" encoding="utf-8"?>
+<p:sld xmlns:a="http://schemas.openxmlformats.org/drawingml/2006/main" xmlns:r="http://schemas.openxmlformats.org/officeDocument/2006/relationships" xmlns:p="http://schemas.openxmlformats.org/presentationml/2006/main">
+  <p:cSld>
+    <p:spTree>
+      <p:nvGrpSpPr>
+        <p:cNvPr id="1" name=""/>
+        <p:cNvGrpSpPr/>
+        <p:nvPr/>
+      </p:nvGrpSpPr>
+      <p:grpSpPr>
+        <a:xfrm>
+          <a:off x="0" y="0"/>
+          <a:ext cx="0" cy="0"/>
+          <a:chOff x="0" y="0"/>
+          <a:chExt cx="0" cy="0"/>
+        </a:xfrm>
+      </p:grpSpPr>
+      <p:sp>
+        <p:nvSpPr>
+          <p:cNvPr id="2" name="Title 1"/>
+          <p:cNvSpPr>
+            <a:spLocks noGrp="1"/>
+          </p:cNvSpPr>
+          <p:nvPr>
+            <p:ph type="title"/>
+          </p:nvPr>
+        </p:nvSpPr>
+        <p:spPr>
+          <a:xfrm>
+            <a:off x="0" y="0"/>
+            <a:ext cx="9144000" cy="582780"/>
+          </a:xfrm>
+        </p:spPr>
+        <p:txBody>
+          <a:bodyPr/>
+          <a:lstStyle/>
+          <a:p>
+            <a:pPr lvl="0" indent="0" marL="0">
+              <a:buNone/>
+            </a:pPr>
+            <a:r>
+              <a:rPr/>
               <a:t>Getting unstuck</a:t>
             </a:r>
           </a:p>
@@ -3862,7 +4457,7 @@
             </a:pPr>
             <a:r>
               <a:rPr sz="2000"/>
-              <a:t>This worksheet demonstrates statistical analysis of lake trout mass data from Island Lake and NE 12, focusing on: testing assumptions for parametric tests, transforming data when assumptions aren’t met, running several different tests (standard t-test, log-transformed t-test, Welch’s t-test, Mann-Whitney Wilcoxon, permutation test), and interpreting/reporting results properly.</a:t>
+              <a:t>I This worksheet demonstrates statistical analysis of lake trout mass data from Island Lake and NE 12, focusing on: testing assumptions for parametric tests, transforming data when assumptions aren’t met, running several different tests (standard t-test, log-transformed t-test, Welch’s t-test, Mann-Whitney Wilcoxon, permutation test), and interpreting/reporting results properly.</a:t>
             </a:r>
           </a:p>
         </p:txBody>
